--- a/51stksts-flyer.pptx
+++ b/51stksts-flyer.pptx
@@ -3239,7 +3239,7 @@
                 </a:solidFill>
                 <a:latin typeface="Noto Sans JP"/>
               </a:rPr>
-              <a:t>2026年10月17日（土）　東京科学大学 蔵前会館 ロイアルブルーホール</a:t>
+              <a:t>2026年10月17日（土）　東京科学大学 蔵前会館 くらまえホール</a:t>
             </a:r>
           </a:p>
         </p:txBody>

--- a/51stksts-flyer.pptx
+++ b/51stksts-flyer.pptx
@@ -4373,7 +4373,7 @@
                 </a:solidFill>
                 <a:latin typeface="Noto Sans JP"/>
               </a:rPr>
-              <a:t>神田 元紀　東京科学大学 総合研究院 難治疾患研究所 教授</a:t>
+              <a:t>神田 元紀　東京科学大学 総合研究院 難治疾患研究所 教授 ロボット未来創造センター 副センター長</a:t>
             </a:r>
           </a:p>
         </p:txBody>

--- a/51stksts-flyer.pptx
+++ b/51stksts-flyer.pptx
@@ -4373,7 +4373,7 @@
                 </a:solidFill>
                 <a:latin typeface="Noto Sans JP"/>
               </a:rPr>
-              <a:t>神田 元紀　東京科学大学 総合研究院 難治疾患研究所 教授 ロボット未来創造センター 副センター長</a:t>
+              <a:t>神田 元紀　東京科学大学 総合研究院 難治疾患研究所 教授，ロボット未来創造センター 副センター長</a:t>
             </a:r>
           </a:p>
         </p:txBody>
